--- a/slides/slide_15.pptx
+++ b/slides/slide_15.pptx
@@ -26,61 +26,38 @@
       <p:bold r:id="rId9"/>
     </p:embeddedFont>
     <p:embeddedFont>
-      <p:font typeface="Bebas Neue" panose="020B0606020202050201" pitchFamily="2" charset="0"/>
+      <p:font typeface="Hanken Grotesk" panose="020B0604020202020204" charset="0"/>
       <p:regular r:id="rId10"/>
-    </p:embeddedFont>
-    <p:embeddedFont>
-      <p:font typeface="DM Mono" panose="020B0509040201040103" pitchFamily="1" charset="0"/>
-      <p:regular r:id="rId11"/>
+      <p:bold r:id="rId11"/>
       <p:italic r:id="rId12"/>
-    </p:embeddedFont>
-    <p:embeddedFont>
-      <p:font typeface="Hanken Grotesk" panose="020B0604020202020204" charset="0"/>
-      <p:regular r:id="rId13"/>
-      <p:bold r:id="rId14"/>
-      <p:italic r:id="rId15"/>
-      <p:boldItalic r:id="rId16"/>
-    </p:embeddedFont>
-    <p:embeddedFont>
-      <p:font typeface="Open Sans" panose="020B0606030504020204" pitchFamily="2" charset="0"/>
-      <p:regular r:id="rId17"/>
-      <p:bold r:id="rId18"/>
-      <p:italic r:id="rId19"/>
-      <p:boldItalic r:id="rId20"/>
+      <p:boldItalic r:id="rId13"/>
     </p:embeddedFont>
     <p:embeddedFont>
       <p:font typeface="Raleway" pitchFamily="2" charset="0"/>
-      <p:regular r:id="rId21"/>
-      <p:bold r:id="rId22"/>
-      <p:italic r:id="rId23"/>
-      <p:boldItalic r:id="rId24"/>
+      <p:regular r:id="rId14"/>
+      <p:bold r:id="rId15"/>
+      <p:italic r:id="rId16"/>
+      <p:boldItalic r:id="rId17"/>
     </p:embeddedFont>
     <p:embeddedFont>
       <p:font typeface="Raleway Black" pitchFamily="2" charset="0"/>
-      <p:bold r:id="rId25"/>
-      <p:boldItalic r:id="rId26"/>
+      <p:bold r:id="rId18"/>
+      <p:boldItalic r:id="rId19"/>
     </p:embeddedFont>
     <p:embeddedFont>
       <p:font typeface="Raleway ExtraBold" pitchFamily="2" charset="0"/>
-      <p:bold r:id="rId27"/>
-      <p:boldItalic r:id="rId28"/>
+      <p:bold r:id="rId20"/>
+      <p:boldItalic r:id="rId21"/>
     </p:embeddedFont>
     <p:embeddedFont>
       <p:font typeface="Roboto Medium" panose="02000000000000000000" pitchFamily="2" charset="0"/>
-      <p:regular r:id="rId29"/>
-      <p:italic r:id="rId30"/>
+      <p:regular r:id="rId22"/>
+      <p:italic r:id="rId23"/>
     </p:embeddedFont>
     <p:embeddedFont>
       <p:font typeface="Roboto" panose="02000000000000000000" pitchFamily="2"/>
-      <p:bold r:id="rId31"/>
-      <p:boldItalic r:id="rId32"/>
-    </p:embeddedFont>
-    <p:embeddedFont>
-      <p:font typeface="Segoe UI" panose="020B0502040204020203" pitchFamily="2" charset="0"/>
-      <p:regular r:id="rId33"/>
-      <p:bold r:id="rId34"/>
-      <p:italic r:id="rId35"/>
-      <p:boldItalic r:id="rId36"/>
+      <p:bold r:id="rId24"/>
+      <p:boldItalic r:id="rId25"/>
     </p:embeddedFont>
   </p:embeddedFontLst>
   <p:custDataLst>
@@ -884,7 +861,7 @@
           <a:bodyPr/>
           <a:lstStyle/>
           <a:p>
-            <a:fld id="{33FC1618-EBBA-48B6-B2BD-15B5E8F48B13}" type="datetimeFigureOut">
+            <a:fld id="{4F53A338-ADD6-4F91-9E21-E0B764880028}" type="datetimeFigureOut">
               <a:rPr lang="en-US" smtClean="0"/>
               <a:t>11/7/2009</a:t>
             </a:fld>
@@ -1048,7 +1025,7 @@
           <a:bodyPr/>
           <a:lstStyle/>
           <a:p>
-            <a:fld id="{65A1623D-CE9B-4F4F-BB01-023125813DEE}" type="datetimeFigureOut">
+            <a:fld id="{46EACBF0-B278-415A-AA3B-F9F5F0F5FDE3}" type="datetimeFigureOut">
               <a:rPr lang="en-US" smtClean="0"/>
               <a:t>11/7/2009</a:t>
             </a:fld>
@@ -1212,7 +1189,7 @@
           <a:bodyPr/>
           <a:lstStyle/>
           <a:p>
-            <a:fld id="{5C252345-445A-4786-B8DE-3207707213A0}" type="datetimeFigureOut">
+            <a:fld id="{3ECFD59D-21FA-47E2-B4D3-F748B7161BDD}" type="datetimeFigureOut">
               <a:rPr lang="en-US" smtClean="0"/>
               <a:t>11/7/2009</a:t>
             </a:fld>
@@ -13117,7 +13094,7 @@
           <a:bodyPr/>
           <a:lstStyle/>
           <a:p>
-            <a:fld id="{341A3693-0F94-41B1-A3F3-2C563026F648}" type="datetimeFigureOut">
+            <a:fld id="{17BD3605-7195-426B-8B3E-A8238DF9DD33}" type="datetimeFigureOut">
               <a:rPr lang="en-US" smtClean="0"/>
               <a:t>11/7/2009</a:t>
             </a:fld>
@@ -33218,7 +33195,7 @@
           <a:bodyPr/>
           <a:lstStyle/>
           <a:p>
-            <a:fld id="{79B8F0CA-7F2F-4D10-B53A-6E0B0ACAE2D4}" type="datetimeFigureOut">
+            <a:fld id="{AE5020B4-C156-4987-9011-E3A88D06E747}" type="datetimeFigureOut">
               <a:rPr lang="en-US" smtClean="0"/>
               <a:t>11/7/2009</a:t>
             </a:fld>
@@ -38865,7 +38842,7 @@
           <a:bodyPr/>
           <a:lstStyle/>
           <a:p>
-            <a:fld id="{4146135E-79CF-44DC-9D47-A33BB15D2EEE}" type="datetimeFigureOut">
+            <a:fld id="{5864C434-0F35-46FE-9897-03C2CA4BB02C}" type="datetimeFigureOut">
               <a:rPr lang="en-US" smtClean="0"/>
               <a:t>11/7/2009</a:t>
             </a:fld>
@@ -39254,7 +39231,7 @@
           <a:bodyPr/>
           <a:lstStyle/>
           <a:p>
-            <a:fld id="{A4EEA62A-6962-4170-8D7D-8F4866C77F1A}" type="datetimeFigureOut">
+            <a:fld id="{8B090697-7021-480A-932B-34FE33A6B528}" type="datetimeFigureOut">
               <a:rPr lang="en-US" smtClean="0"/>
               <a:t>11/7/2009</a:t>
             </a:fld>
@@ -39367,7 +39344,7 @@
           <a:bodyPr/>
           <a:lstStyle/>
           <a:p>
-            <a:fld id="{A0E84263-2948-4C47-B0A0-C82FBA7E50A2}" type="datetimeFigureOut">
+            <a:fld id="{47F269F2-7F7F-49D4-AC14-7A2F1B61CF5A}" type="datetimeFigureOut">
               <a:rPr lang="en-US" smtClean="0"/>
               <a:t>11/7/2009</a:t>
             </a:fld>
@@ -39457,7 +39434,7 @@
           <a:bodyPr/>
           <a:lstStyle/>
           <a:p>
-            <a:fld id="{5599AC19-41A5-419E-A4A0-B43A9A9AFFC6}" type="datetimeFigureOut">
+            <a:fld id="{8A51F419-ABE5-43F6-AE58-96F5CC5FE926}" type="datetimeFigureOut">
               <a:rPr lang="en-US" smtClean="0"/>
               <a:t>11/7/2009</a:t>
             </a:fld>
@@ -39712,7 +39689,7 @@
           <a:bodyPr/>
           <a:lstStyle/>
           <a:p>
-            <a:fld id="{90D0C646-9DDC-465C-B7C9-819F930BEE98}" type="datetimeFigureOut">
+            <a:fld id="{BF9A2B61-7E0C-41A5-A771-3234BBBD97C9}" type="datetimeFigureOut">
               <a:rPr lang="en-US" smtClean="0"/>
               <a:t>11/7/2009</a:t>
             </a:fld>
@@ -39944,7 +39921,7 @@
           <a:bodyPr/>
           <a:lstStyle/>
           <a:p>
-            <a:fld id="{66A3BA63-2ACF-41CC-A259-4CB0F27ECBCA}" type="datetimeFigureOut">
+            <a:fld id="{AD37A101-8134-4183-BF84-AE4BCDD56678}" type="datetimeFigureOut">
               <a:rPr lang="en-US" smtClean="0"/>
               <a:t>11/7/2009</a:t>
             </a:fld>
@@ -41804,15 +41781,15 @@
           <a:lstStyle/>
           <a:p>
             <a:r>
-              <a:rPr lang="en">
-                <a:cs typeface="Segoe UI"/>
+              <a:rPr lang="en" b="1">
+                <a:latin typeface="Arial"/>
+                <a:cs typeface="Arial"/>
               </a:rPr>
               <a:t>КАРТА ЭТАПОВ</a:t>
             </a:r>
-            <a:endParaRPr lang="en" sz="2600" b="0">
-              <a:latin typeface="Raleway Black"/>
-              <a:ea typeface="Raleway Black"/>
-              <a:cs typeface="Segoe UI"/>
+            <a:endParaRPr lang="en" sz="2600" b="1">
+              <a:latin typeface="Arial"/>
+              <a:cs typeface="Arial"/>
             </a:endParaRPr>
           </a:p>
         </p:txBody>
@@ -41826,14 +41803,14 @@
           <p:nvPr>
             <p:extLst>
               <p:ext uri="{D42A27DB-BD31-4B8C-83A1-F6EECF244321}">
-                <p14:modId val="687158154"/>
+                <p14:modId val="3430531883"/>
               </p:ext>
             </p:extLst>
           </p:nvPr>
         </p:nvGraphicFramePr>
         <p:xfrm>
           <a:off x="726875" y="1071988"/>
-          <a:ext cx="7704050" cy="3213980"/>
+          <a:ext cx="7704050" cy="3183500"/>
         </p:xfrm>
         <a:graphic>
           <a:graphicData uri="http://schemas.openxmlformats.org/drawingml/2006/table">
@@ -41962,9 +41939,9 @@
                           <a:solidFill>
                             <a:schemeClr val="dk1"/>
                           </a:solidFill>
-                          <a:latin typeface="Raleway"/>
+                          <a:latin typeface="Arial"/>
                           <a:ea typeface="Raleway"/>
-                          <a:cs typeface="Raleway"/>
+                          <a:cs typeface="Arial"/>
                         </a:rPr>
                         <a:t>ИНИЦИАТИВА</a:t>
                       </a:r>
@@ -41972,9 +41949,9 @@
                         <a:solidFill>
                           <a:schemeClr val="dk1"/>
                         </a:solidFill>
-                        <a:latin typeface="Raleway"/>
+                        <a:latin typeface="Arial"/>
                         <a:ea typeface="Raleway"/>
-                        <a:cs typeface="Raleway"/>
+                        <a:cs typeface="Arial"/>
                         <a:sym typeface="Raleway"/>
                       </a:endParaRPr>
                     </a:p>
@@ -42042,9 +42019,9 @@
                           <a:solidFill>
                             <a:schemeClr val="dk1"/>
                           </a:solidFill>
-                          <a:latin typeface="Raleway"/>
+                          <a:latin typeface="Arial"/>
                           <a:ea typeface="Raleway"/>
-                          <a:cs typeface="Raleway"/>
+                          <a:cs typeface="Arial"/>
                         </a:rPr>
                         <a:t>ЦЕЛЬ</a:t>
                       </a:r>
@@ -42052,9 +42029,9 @@
                         <a:solidFill>
                           <a:schemeClr val="dk1"/>
                         </a:solidFill>
-                        <a:latin typeface="Raleway"/>
+                        <a:latin typeface="Arial"/>
                         <a:ea typeface="Raleway"/>
-                        <a:cs typeface="Raleway"/>
+                        <a:cs typeface="Arial"/>
                         <a:sym typeface="Raleway"/>
                       </a:endParaRPr>
                     </a:p>
@@ -42122,9 +42099,9 @@
                           <a:solidFill>
                             <a:schemeClr val="dk1"/>
                           </a:solidFill>
-                          <a:latin typeface="Raleway"/>
+                          <a:latin typeface="Arial"/>
                           <a:ea typeface="Raleway"/>
-                          <a:cs typeface="Raleway"/>
+                          <a:cs typeface="Arial"/>
                           <a:sym typeface="Raleway"/>
                         </a:rPr>
                         <a:t>JAN</a:t>
@@ -42133,9 +42110,9 @@
                         <a:solidFill>
                           <a:schemeClr val="dk1"/>
                         </a:solidFill>
-                        <a:latin typeface="Raleway"/>
+                        <a:latin typeface="Arial"/>
                         <a:ea typeface="Raleway"/>
-                        <a:cs typeface="Raleway"/>
+                        <a:cs typeface="Arial"/>
                         <a:sym typeface="Raleway"/>
                       </a:endParaRPr>
                     </a:p>
@@ -42203,9 +42180,9 @@
                           <a:solidFill>
                             <a:schemeClr val="dk1"/>
                           </a:solidFill>
-                          <a:latin typeface="Raleway"/>
+                          <a:latin typeface="Arial"/>
                           <a:ea typeface="Raleway"/>
-                          <a:cs typeface="Raleway"/>
+                          <a:cs typeface="Arial"/>
                           <a:sym typeface="Raleway"/>
                         </a:rPr>
                         <a:t>FEB</a:t>
@@ -42214,9 +42191,9 @@
                         <a:solidFill>
                           <a:schemeClr val="dk1"/>
                         </a:solidFill>
-                        <a:latin typeface="Raleway"/>
+                        <a:latin typeface="Arial"/>
                         <a:ea typeface="Raleway"/>
-                        <a:cs typeface="Raleway"/>
+                        <a:cs typeface="Arial"/>
                         <a:sym typeface="Raleway"/>
                       </a:endParaRPr>
                     </a:p>
@@ -42284,9 +42261,9 @@
                           <a:solidFill>
                             <a:schemeClr val="dk1"/>
                           </a:solidFill>
-                          <a:latin typeface="Raleway"/>
+                          <a:latin typeface="Arial"/>
                           <a:ea typeface="Raleway"/>
-                          <a:cs typeface="Raleway"/>
+                          <a:cs typeface="Arial"/>
                           <a:sym typeface="Raleway"/>
                         </a:rPr>
                         <a:t>MAR</a:t>
@@ -42295,9 +42272,9 @@
                         <a:solidFill>
                           <a:schemeClr val="dk1"/>
                         </a:solidFill>
-                        <a:latin typeface="Raleway"/>
+                        <a:latin typeface="Arial"/>
                         <a:ea typeface="Raleway"/>
-                        <a:cs typeface="Raleway"/>
+                        <a:cs typeface="Arial"/>
                         <a:sym typeface="Raleway"/>
                       </a:endParaRPr>
                     </a:p>
@@ -42370,9 +42347,9 @@
                           <a:solidFill>
                             <a:schemeClr val="dk1"/>
                           </a:solidFill>
-                          <a:latin typeface="Raleway"/>
+                          <a:latin typeface="Arial"/>
                           <a:ea typeface="Raleway"/>
-                          <a:cs typeface="Raleway"/>
+                          <a:cs typeface="Arial"/>
                           <a:sym typeface="Raleway"/>
                         </a:rPr>
                         <a:t>APR</a:t>
@@ -42381,9 +42358,9 @@
                         <a:solidFill>
                           <a:schemeClr val="dk1"/>
                         </a:solidFill>
-                        <a:latin typeface="Raleway"/>
+                        <a:latin typeface="Arial"/>
                         <a:ea typeface="Raleway"/>
-                        <a:cs typeface="Raleway"/>
+                        <a:cs typeface="Arial"/>
                         <a:sym typeface="Raleway"/>
                       </a:endParaRPr>
                     </a:p>
@@ -42451,9 +42428,9 @@
                           <a:solidFill>
                             <a:schemeClr val="dk1"/>
                           </a:solidFill>
-                          <a:latin typeface="Raleway"/>
+                          <a:latin typeface="Arial"/>
                           <a:ea typeface="Raleway"/>
-                          <a:cs typeface="Raleway"/>
+                          <a:cs typeface="Arial"/>
                           <a:sym typeface="Raleway"/>
                         </a:rPr>
                         <a:t>MAY</a:t>
@@ -42462,9 +42439,9 @@
                         <a:solidFill>
                           <a:schemeClr val="dk1"/>
                         </a:solidFill>
-                        <a:latin typeface="Raleway"/>
+                        <a:latin typeface="Arial"/>
                         <a:ea typeface="Raleway"/>
-                        <a:cs typeface="Raleway"/>
+                        <a:cs typeface="Arial"/>
                         <a:sym typeface="Raleway"/>
                       </a:endParaRPr>
                     </a:p>
@@ -42532,9 +42509,9 @@
                           <a:solidFill>
                             <a:schemeClr val="dk1"/>
                           </a:solidFill>
-                          <a:latin typeface="Raleway"/>
+                          <a:latin typeface="Arial"/>
                           <a:ea typeface="Raleway"/>
-                          <a:cs typeface="Raleway"/>
+                          <a:cs typeface="Arial"/>
                           <a:sym typeface="Raleway"/>
                         </a:rPr>
                         <a:t>JUN</a:t>
@@ -42543,9 +42520,9 @@
                         <a:solidFill>
                           <a:schemeClr val="dk1"/>
                         </a:solidFill>
-                        <a:latin typeface="Raleway"/>
+                        <a:latin typeface="Arial"/>
                         <a:ea typeface="Raleway"/>
-                        <a:cs typeface="Raleway"/>
+                        <a:cs typeface="Arial"/>
                         <a:sym typeface="Raleway"/>
                       </a:endParaRPr>
                     </a:p>
@@ -42613,9 +42590,9 @@
                           <a:solidFill>
                             <a:schemeClr val="dk1"/>
                           </a:solidFill>
-                          <a:latin typeface="Raleway"/>
+                          <a:latin typeface="Arial"/>
                           <a:ea typeface="Raleway"/>
-                          <a:cs typeface="Raleway"/>
+                          <a:cs typeface="Arial"/>
                           <a:sym typeface="Raleway"/>
                         </a:rPr>
                         <a:t>JUL</a:t>
@@ -42624,9 +42601,9 @@
                         <a:solidFill>
                           <a:schemeClr val="dk1"/>
                         </a:solidFill>
-                        <a:latin typeface="Raleway"/>
+                        <a:latin typeface="Arial"/>
                         <a:ea typeface="Raleway"/>
-                        <a:cs typeface="Raleway"/>
+                        <a:cs typeface="Arial"/>
                         <a:sym typeface="Raleway"/>
                       </a:endParaRPr>
                     </a:p>
@@ -42694,9 +42671,9 @@
                           <a:solidFill>
                             <a:schemeClr val="dk1"/>
                           </a:solidFill>
-                          <a:latin typeface="Raleway"/>
+                          <a:latin typeface="Arial"/>
                           <a:ea typeface="Raleway"/>
-                          <a:cs typeface="Raleway"/>
+                          <a:cs typeface="Arial"/>
                           <a:sym typeface="Raleway"/>
                         </a:rPr>
                         <a:t>AUG</a:t>
@@ -42705,9 +42682,9 @@
                         <a:solidFill>
                           <a:schemeClr val="dk1"/>
                         </a:solidFill>
-                        <a:latin typeface="Raleway"/>
+                        <a:latin typeface="Arial"/>
                         <a:ea typeface="Raleway"/>
-                        <a:cs typeface="Raleway"/>
+                        <a:cs typeface="Arial"/>
                         <a:sym typeface="Raleway"/>
                       </a:endParaRPr>
                     </a:p>
@@ -42775,9 +42752,9 @@
                           <a:solidFill>
                             <a:schemeClr val="dk1"/>
                           </a:solidFill>
-                          <a:latin typeface="Raleway"/>
+                          <a:latin typeface="Arial"/>
                           <a:ea typeface="Raleway"/>
-                          <a:cs typeface="Raleway"/>
+                          <a:cs typeface="Arial"/>
                           <a:sym typeface="Raleway"/>
                         </a:rPr>
                         <a:t>SEP</a:t>
@@ -42786,9 +42763,9 @@
                         <a:solidFill>
                           <a:schemeClr val="dk1"/>
                         </a:solidFill>
-                        <a:latin typeface="Raleway"/>
+                        <a:latin typeface="Arial"/>
                         <a:ea typeface="Raleway"/>
-                        <a:cs typeface="Raleway"/>
+                        <a:cs typeface="Arial"/>
                         <a:sym typeface="Raleway"/>
                       </a:endParaRPr>
                     </a:p>
@@ -42856,9 +42833,9 @@
                           <a:solidFill>
                             <a:schemeClr val="dk1"/>
                           </a:solidFill>
-                          <a:latin typeface="Raleway"/>
+                          <a:latin typeface="Arial"/>
                           <a:ea typeface="Raleway"/>
-                          <a:cs typeface="Raleway"/>
+                          <a:cs typeface="Arial"/>
                           <a:sym typeface="Raleway"/>
                         </a:rPr>
                         <a:t>OCT</a:t>
@@ -42867,9 +42844,9 @@
                         <a:solidFill>
                           <a:schemeClr val="dk1"/>
                         </a:solidFill>
-                        <a:latin typeface="Raleway"/>
+                        <a:latin typeface="Arial"/>
                         <a:ea typeface="Raleway"/>
-                        <a:cs typeface="Raleway"/>
+                        <a:cs typeface="Arial"/>
                         <a:sym typeface="Raleway"/>
                       </a:endParaRPr>
                     </a:p>
@@ -42937,9 +42914,9 @@
                           <a:solidFill>
                             <a:schemeClr val="dk1"/>
                           </a:solidFill>
-                          <a:latin typeface="Raleway"/>
+                          <a:latin typeface="Arial"/>
                           <a:ea typeface="Raleway"/>
-                          <a:cs typeface="Raleway"/>
+                          <a:cs typeface="Arial"/>
                           <a:sym typeface="Raleway"/>
                         </a:rPr>
                         <a:t>NOV</a:t>
@@ -42948,9 +42925,9 @@
                         <a:solidFill>
                           <a:schemeClr val="dk1"/>
                         </a:solidFill>
-                        <a:latin typeface="Raleway"/>
+                        <a:latin typeface="Arial"/>
                         <a:ea typeface="Raleway"/>
-                        <a:cs typeface="Raleway"/>
+                        <a:cs typeface="Arial"/>
                         <a:sym typeface="Raleway"/>
                       </a:endParaRPr>
                     </a:p>
@@ -43023,9 +43000,9 @@
                           <a:solidFill>
                             <a:schemeClr val="dk1"/>
                           </a:solidFill>
-                          <a:latin typeface="Raleway"/>
+                          <a:latin typeface="Arial"/>
                           <a:ea typeface="Raleway"/>
-                          <a:cs typeface="Raleway"/>
+                          <a:cs typeface="Arial"/>
                           <a:sym typeface="Raleway"/>
                         </a:rPr>
                         <a:t>DEC</a:t>
@@ -43034,9 +43011,9 @@
                         <a:solidFill>
                           <a:schemeClr val="dk1"/>
                         </a:solidFill>
-                        <a:latin typeface="Raleway"/>
+                        <a:latin typeface="Arial"/>
                         <a:ea typeface="Raleway"/>
-                        <a:cs typeface="Raleway"/>
+                        <a:cs typeface="Arial"/>
                         <a:sym typeface="Raleway"/>
                       </a:endParaRPr>
                     </a:p>
@@ -43111,9 +43088,9 @@
                           <a:solidFill>
                             <a:schemeClr val="dk1"/>
                           </a:solidFill>
-                          <a:latin typeface="Hanken Grotesk"/>
+                          <a:latin typeface="Arial"/>
                           <a:ea typeface="Hanken Grotesk"/>
-                          <a:cs typeface="Hanken Grotesk"/>
+                          <a:cs typeface="Arial"/>
                         </a:rPr>
                         <a:t>Изучение</a:t>
                       </a:r>
@@ -43121,9 +43098,9 @@
                         <a:solidFill>
                           <a:schemeClr val="dk1"/>
                         </a:solidFill>
-                        <a:latin typeface="Hanken Grotesk"/>
+                        <a:latin typeface="Arial"/>
                         <a:ea typeface="Hanken Grotesk"/>
-                        <a:cs typeface="Hanken Grotesk"/>
+                        <a:cs typeface="Arial"/>
                         <a:sym typeface="Hanken Grotesk"/>
                       </a:endParaRPr>
                     </a:p>
@@ -43185,17 +43162,21 @@
                         <a:buNone/>
                       </a:pPr>
                       <a:r>
-                        <a:rPr lang="en" sz="1100" b="0" i="0" u="none" strike="noStrike" noProof="0" err="1">
+                        <a:rPr lang="en" sz="1000" b="0" i="0" u="none" strike="noStrike" noProof="0" err="1">
                           <a:solidFill>
                             <a:srgbClr val="F9FAFB"/>
                           </a:solidFill>
                           <a:highlight>
                             <a:srgbClr val="151517"/>
                           </a:highlight>
+                          <a:latin typeface="Arial"/>
+                          <a:cs typeface="Arial"/>
                         </a:rPr>
                         <a:t>Проанализировать и понять потребности целевой аудитории</a:t>
                       </a:r>
-                      <a:endParaRPr lang="ru-RU" err="1">
+                      <a:endParaRPr lang="ru-RU" sz="1000">
+                        <a:latin typeface="Arial"/>
+                        <a:cs typeface="Arial"/>
                         <a:sym typeface="Hanken Grotesk"/>
                       </a:endParaRPr>
                     </a:p>
@@ -43260,9 +43241,9 @@
                         <a:solidFill>
                           <a:schemeClr val="dk1"/>
                         </a:solidFill>
-                        <a:latin typeface="Open Sans"/>
+                        <a:latin typeface="Arial"/>
                         <a:ea typeface="Open Sans"/>
-                        <a:cs typeface="Open Sans"/>
+                        <a:cs typeface="Arial"/>
                         <a:sym typeface="Open Sans"/>
                       </a:endParaRPr>
                     </a:p>
@@ -43327,9 +43308,9 @@
                         <a:solidFill>
                           <a:schemeClr val="dk1"/>
                         </a:solidFill>
-                        <a:latin typeface="Open Sans"/>
+                        <a:latin typeface="Arial"/>
                         <a:ea typeface="Open Sans"/>
-                        <a:cs typeface="Open Sans"/>
+                        <a:cs typeface="Arial"/>
                         <a:sym typeface="Open Sans"/>
                       </a:endParaRPr>
                     </a:p>
@@ -43394,9 +43375,9 @@
                         <a:solidFill>
                           <a:schemeClr val="dk1"/>
                         </a:solidFill>
-                        <a:latin typeface="Open Sans"/>
+                        <a:latin typeface="Arial"/>
                         <a:ea typeface="Open Sans"/>
-                        <a:cs typeface="Open Sans"/>
+                        <a:cs typeface="Arial"/>
                         <a:sym typeface="Open Sans"/>
                       </a:endParaRPr>
                     </a:p>
@@ -43461,9 +43442,9 @@
                         <a:solidFill>
                           <a:schemeClr val="dk1"/>
                         </a:solidFill>
-                        <a:latin typeface="Open Sans"/>
+                        <a:latin typeface="Arial"/>
                         <a:ea typeface="Open Sans"/>
-                        <a:cs typeface="Open Sans"/>
+                        <a:cs typeface="Arial"/>
                         <a:sym typeface="Open Sans"/>
                       </a:endParaRPr>
                     </a:p>
@@ -43528,9 +43509,9 @@
                         <a:solidFill>
                           <a:schemeClr val="dk1"/>
                         </a:solidFill>
-                        <a:latin typeface="Open Sans"/>
+                        <a:latin typeface="Arial"/>
                         <a:ea typeface="Open Sans"/>
-                        <a:cs typeface="Open Sans"/>
+                        <a:cs typeface="Arial"/>
                         <a:sym typeface="Open Sans"/>
                       </a:endParaRPr>
                     </a:p>
@@ -43595,9 +43576,9 @@
                         <a:solidFill>
                           <a:schemeClr val="dk1"/>
                         </a:solidFill>
-                        <a:latin typeface="Open Sans"/>
+                        <a:latin typeface="Arial"/>
                         <a:ea typeface="Open Sans"/>
-                        <a:cs typeface="Open Sans"/>
+                        <a:cs typeface="Arial"/>
                         <a:sym typeface="Open Sans"/>
                       </a:endParaRPr>
                     </a:p>
@@ -43662,9 +43643,9 @@
                         <a:solidFill>
                           <a:schemeClr val="dk1"/>
                         </a:solidFill>
-                        <a:latin typeface="Open Sans"/>
+                        <a:latin typeface="Arial"/>
                         <a:ea typeface="Open Sans"/>
-                        <a:cs typeface="Open Sans"/>
+                        <a:cs typeface="Arial"/>
                         <a:sym typeface="Open Sans"/>
                       </a:endParaRPr>
                     </a:p>
@@ -43729,9 +43710,9 @@
                         <a:solidFill>
                           <a:schemeClr val="dk1"/>
                         </a:solidFill>
-                        <a:latin typeface="Open Sans"/>
+                        <a:latin typeface="Arial"/>
                         <a:ea typeface="Open Sans"/>
-                        <a:cs typeface="Open Sans"/>
+                        <a:cs typeface="Arial"/>
                         <a:sym typeface="Open Sans"/>
                       </a:endParaRPr>
                     </a:p>
@@ -43796,9 +43777,9 @@
                         <a:solidFill>
                           <a:schemeClr val="dk1"/>
                         </a:solidFill>
-                        <a:latin typeface="Open Sans"/>
+                        <a:latin typeface="Arial"/>
                         <a:ea typeface="Open Sans"/>
-                        <a:cs typeface="Open Sans"/>
+                        <a:cs typeface="Arial"/>
                         <a:sym typeface="Open Sans"/>
                       </a:endParaRPr>
                     </a:p>
@@ -43863,9 +43844,9 @@
                         <a:solidFill>
                           <a:schemeClr val="dk1"/>
                         </a:solidFill>
-                        <a:latin typeface="Open Sans"/>
+                        <a:latin typeface="Arial"/>
                         <a:ea typeface="Open Sans"/>
-                        <a:cs typeface="Open Sans"/>
+                        <a:cs typeface="Arial"/>
                         <a:sym typeface="Open Sans"/>
                       </a:endParaRPr>
                     </a:p>
@@ -43930,9 +43911,9 @@
                         <a:solidFill>
                           <a:schemeClr val="dk1"/>
                         </a:solidFill>
-                        <a:latin typeface="Open Sans"/>
+                        <a:latin typeface="Arial"/>
                         <a:ea typeface="Open Sans"/>
-                        <a:cs typeface="Open Sans"/>
+                        <a:cs typeface="Arial"/>
                         <a:sym typeface="Open Sans"/>
                       </a:endParaRPr>
                     </a:p>
@@ -43997,9 +43978,9 @@
                         <a:solidFill>
                           <a:schemeClr val="dk1"/>
                         </a:solidFill>
-                        <a:latin typeface="Open Sans"/>
+                        <a:latin typeface="Arial"/>
                         <a:ea typeface="Open Sans"/>
-                        <a:cs typeface="Open Sans"/>
+                        <a:cs typeface="Arial"/>
                         <a:sym typeface="Open Sans"/>
                       </a:endParaRPr>
                     </a:p>
@@ -44071,9 +44052,9 @@
                         <a:solidFill>
                           <a:schemeClr val="dk1"/>
                         </a:solidFill>
-                        <a:latin typeface="Hanken Grotesk"/>
+                        <a:latin typeface="Arial"/>
                         <a:ea typeface="Hanken Grotesk"/>
-                        <a:cs typeface="Hanken Grotesk"/>
+                        <a:cs typeface="Arial"/>
                         <a:sym typeface="Hanken Grotesk"/>
                       </a:endParaRPr>
                     </a:p>
@@ -44138,9 +44119,9 @@
                         <a:solidFill>
                           <a:schemeClr val="dk1"/>
                         </a:solidFill>
-                        <a:latin typeface="Hanken Grotesk"/>
+                        <a:latin typeface="Arial"/>
                         <a:ea typeface="Hanken Grotesk"/>
-                        <a:cs typeface="Hanken Grotesk"/>
+                        <a:cs typeface="Arial"/>
                         <a:sym typeface="Hanken Grotesk"/>
                       </a:endParaRPr>
                     </a:p>
@@ -44205,9 +44186,9 @@
                         <a:solidFill>
                           <a:schemeClr val="dk1"/>
                         </a:solidFill>
-                        <a:latin typeface="Open Sans"/>
+                        <a:latin typeface="Arial"/>
                         <a:ea typeface="Open Sans"/>
-                        <a:cs typeface="Open Sans"/>
+                        <a:cs typeface="Arial"/>
                         <a:sym typeface="Open Sans"/>
                       </a:endParaRPr>
                     </a:p>
@@ -44272,9 +44253,9 @@
                         <a:solidFill>
                           <a:schemeClr val="dk1"/>
                         </a:solidFill>
-                        <a:latin typeface="Open Sans"/>
+                        <a:latin typeface="Arial"/>
                         <a:ea typeface="Open Sans"/>
-                        <a:cs typeface="Open Sans"/>
+                        <a:cs typeface="Arial"/>
                         <a:sym typeface="Open Sans"/>
                       </a:endParaRPr>
                     </a:p>
@@ -44339,9 +44320,9 @@
                         <a:solidFill>
                           <a:schemeClr val="dk1"/>
                         </a:solidFill>
-                        <a:latin typeface="Open Sans"/>
+                        <a:latin typeface="Arial"/>
                         <a:ea typeface="Open Sans"/>
-                        <a:cs typeface="Open Sans"/>
+                        <a:cs typeface="Arial"/>
                         <a:sym typeface="Open Sans"/>
                       </a:endParaRPr>
                     </a:p>
@@ -44406,9 +44387,9 @@
                         <a:solidFill>
                           <a:schemeClr val="dk1"/>
                         </a:solidFill>
-                        <a:latin typeface="Open Sans"/>
+                        <a:latin typeface="Arial"/>
                         <a:ea typeface="Open Sans"/>
-                        <a:cs typeface="Open Sans"/>
+                        <a:cs typeface="Arial"/>
                         <a:sym typeface="Open Sans"/>
                       </a:endParaRPr>
                     </a:p>
@@ -44473,9 +44454,9 @@
                         <a:solidFill>
                           <a:schemeClr val="dk1"/>
                         </a:solidFill>
-                        <a:latin typeface="Open Sans"/>
+                        <a:latin typeface="Arial"/>
                         <a:ea typeface="Open Sans"/>
-                        <a:cs typeface="Open Sans"/>
+                        <a:cs typeface="Arial"/>
                         <a:sym typeface="Open Sans"/>
                       </a:endParaRPr>
                     </a:p>
@@ -44540,9 +44521,9 @@
                         <a:solidFill>
                           <a:schemeClr val="dk1"/>
                         </a:solidFill>
-                        <a:latin typeface="Open Sans"/>
+                        <a:latin typeface="Arial"/>
                         <a:ea typeface="Open Sans"/>
-                        <a:cs typeface="Open Sans"/>
+                        <a:cs typeface="Arial"/>
                         <a:sym typeface="Open Sans"/>
                       </a:endParaRPr>
                     </a:p>
@@ -44607,9 +44588,9 @@
                         <a:solidFill>
                           <a:schemeClr val="dk1"/>
                         </a:solidFill>
-                        <a:latin typeface="Open Sans"/>
+                        <a:latin typeface="Arial"/>
                         <a:ea typeface="Open Sans"/>
-                        <a:cs typeface="Open Sans"/>
+                        <a:cs typeface="Arial"/>
                         <a:sym typeface="Open Sans"/>
                       </a:endParaRPr>
                     </a:p>
@@ -44674,9 +44655,9 @@
                         <a:solidFill>
                           <a:schemeClr val="dk1"/>
                         </a:solidFill>
-                        <a:latin typeface="Open Sans"/>
+                        <a:latin typeface="Arial"/>
                         <a:ea typeface="Open Sans"/>
-                        <a:cs typeface="Open Sans"/>
+                        <a:cs typeface="Arial"/>
                         <a:sym typeface="Open Sans"/>
                       </a:endParaRPr>
                     </a:p>
@@ -44741,9 +44722,9 @@
                         <a:solidFill>
                           <a:schemeClr val="dk1"/>
                         </a:solidFill>
-                        <a:latin typeface="Open Sans"/>
+                        <a:latin typeface="Arial"/>
                         <a:ea typeface="Open Sans"/>
-                        <a:cs typeface="Open Sans"/>
+                        <a:cs typeface="Arial"/>
                         <a:sym typeface="Open Sans"/>
                       </a:endParaRPr>
                     </a:p>
@@ -44808,9 +44789,9 @@
                         <a:solidFill>
                           <a:schemeClr val="dk1"/>
                         </a:solidFill>
-                        <a:latin typeface="Open Sans"/>
+                        <a:latin typeface="Arial"/>
                         <a:ea typeface="Open Sans"/>
-                        <a:cs typeface="Open Sans"/>
+                        <a:cs typeface="Arial"/>
                         <a:sym typeface="Open Sans"/>
                       </a:endParaRPr>
                     </a:p>
@@ -44875,9 +44856,9 @@
                         <a:solidFill>
                           <a:schemeClr val="dk1"/>
                         </a:solidFill>
-                        <a:latin typeface="Open Sans"/>
+                        <a:latin typeface="Arial"/>
                         <a:ea typeface="Open Sans"/>
-                        <a:cs typeface="Open Sans"/>
+                        <a:cs typeface="Arial"/>
                         <a:sym typeface="Open Sans"/>
                       </a:endParaRPr>
                     </a:p>
@@ -44942,9 +44923,9 @@
                         <a:solidFill>
                           <a:schemeClr val="dk1"/>
                         </a:solidFill>
-                        <a:latin typeface="Open Sans"/>
+                        <a:latin typeface="Arial"/>
                         <a:ea typeface="Open Sans"/>
-                        <a:cs typeface="Open Sans"/>
+                        <a:cs typeface="Arial"/>
                         <a:sym typeface="Open Sans"/>
                       </a:endParaRPr>
                     </a:p>
@@ -45016,9 +44997,9 @@
                         <a:solidFill>
                           <a:schemeClr val="dk1"/>
                         </a:solidFill>
-                        <a:latin typeface="Hanken Grotesk"/>
+                        <a:latin typeface="Arial"/>
                         <a:ea typeface="Hanken Grotesk"/>
-                        <a:cs typeface="Hanken Grotesk"/>
+                        <a:cs typeface="Arial"/>
                         <a:sym typeface="Hanken Grotesk"/>
                       </a:endParaRPr>
                     </a:p>
@@ -45083,9 +45064,9 @@
                         <a:solidFill>
                           <a:schemeClr val="dk1"/>
                         </a:solidFill>
-                        <a:latin typeface="Hanken Grotesk"/>
+                        <a:latin typeface="Arial"/>
                         <a:ea typeface="Hanken Grotesk"/>
-                        <a:cs typeface="Hanken Grotesk"/>
+                        <a:cs typeface="Arial"/>
                         <a:sym typeface="Hanken Grotesk"/>
                       </a:endParaRPr>
                     </a:p>
@@ -45150,9 +45131,9 @@
                         <a:solidFill>
                           <a:schemeClr val="dk1"/>
                         </a:solidFill>
-                        <a:latin typeface="Open Sans"/>
+                        <a:latin typeface="Arial"/>
                         <a:ea typeface="Open Sans"/>
-                        <a:cs typeface="Open Sans"/>
+                        <a:cs typeface="Arial"/>
                         <a:sym typeface="Open Sans"/>
                       </a:endParaRPr>
                     </a:p>
@@ -45217,9 +45198,9 @@
                         <a:solidFill>
                           <a:schemeClr val="dk1"/>
                         </a:solidFill>
-                        <a:latin typeface="Open Sans"/>
+                        <a:latin typeface="Arial"/>
                         <a:ea typeface="Open Sans"/>
-                        <a:cs typeface="Open Sans"/>
+                        <a:cs typeface="Arial"/>
                         <a:sym typeface="Open Sans"/>
                       </a:endParaRPr>
                     </a:p>
@@ -45284,9 +45265,9 @@
                         <a:solidFill>
                           <a:schemeClr val="dk1"/>
                         </a:solidFill>
-                        <a:latin typeface="Open Sans"/>
+                        <a:latin typeface="Arial"/>
                         <a:ea typeface="Open Sans"/>
-                        <a:cs typeface="Open Sans"/>
+                        <a:cs typeface="Arial"/>
                         <a:sym typeface="Open Sans"/>
                       </a:endParaRPr>
                     </a:p>
@@ -45351,9 +45332,9 @@
                         <a:solidFill>
                           <a:schemeClr val="dk1"/>
                         </a:solidFill>
-                        <a:latin typeface="Open Sans"/>
+                        <a:latin typeface="Arial"/>
                         <a:ea typeface="Open Sans"/>
-                        <a:cs typeface="Open Sans"/>
+                        <a:cs typeface="Arial"/>
                         <a:sym typeface="Open Sans"/>
                       </a:endParaRPr>
                     </a:p>
@@ -45418,9 +45399,9 @@
                         <a:solidFill>
                           <a:schemeClr val="dk1"/>
                         </a:solidFill>
-                        <a:latin typeface="Open Sans"/>
+                        <a:latin typeface="Arial"/>
                         <a:ea typeface="Open Sans"/>
-                        <a:cs typeface="Open Sans"/>
+                        <a:cs typeface="Arial"/>
                         <a:sym typeface="Open Sans"/>
                       </a:endParaRPr>
                     </a:p>
@@ -45485,9 +45466,9 @@
                         <a:solidFill>
                           <a:schemeClr val="dk1"/>
                         </a:solidFill>
-                        <a:latin typeface="Open Sans"/>
+                        <a:latin typeface="Arial"/>
                         <a:ea typeface="Open Sans"/>
-                        <a:cs typeface="Open Sans"/>
+                        <a:cs typeface="Arial"/>
                         <a:sym typeface="Open Sans"/>
                       </a:endParaRPr>
                     </a:p>
@@ -45552,9 +45533,9 @@
                         <a:solidFill>
                           <a:schemeClr val="dk1"/>
                         </a:solidFill>
-                        <a:latin typeface="Open Sans"/>
+                        <a:latin typeface="Arial"/>
                         <a:ea typeface="Open Sans"/>
-                        <a:cs typeface="Open Sans"/>
+                        <a:cs typeface="Arial"/>
                         <a:sym typeface="Open Sans"/>
                       </a:endParaRPr>
                     </a:p>
@@ -45619,9 +45600,9 @@
                         <a:solidFill>
                           <a:schemeClr val="dk1"/>
                         </a:solidFill>
-                        <a:latin typeface="Open Sans"/>
+                        <a:latin typeface="Arial"/>
                         <a:ea typeface="Open Sans"/>
-                        <a:cs typeface="Open Sans"/>
+                        <a:cs typeface="Arial"/>
                         <a:sym typeface="Open Sans"/>
                       </a:endParaRPr>
                     </a:p>
@@ -45686,9 +45667,9 @@
                         <a:solidFill>
                           <a:schemeClr val="dk1"/>
                         </a:solidFill>
-                        <a:latin typeface="Open Sans"/>
+                        <a:latin typeface="Arial"/>
                         <a:ea typeface="Open Sans"/>
-                        <a:cs typeface="Open Sans"/>
+                        <a:cs typeface="Arial"/>
                         <a:sym typeface="Open Sans"/>
                       </a:endParaRPr>
                     </a:p>
@@ -45753,9 +45734,9 @@
                         <a:solidFill>
                           <a:schemeClr val="dk1"/>
                         </a:solidFill>
-                        <a:latin typeface="Open Sans"/>
+                        <a:latin typeface="Arial"/>
                         <a:ea typeface="Open Sans"/>
-                        <a:cs typeface="Open Sans"/>
+                        <a:cs typeface="Arial"/>
                         <a:sym typeface="Open Sans"/>
                       </a:endParaRPr>
                     </a:p>
@@ -45820,9 +45801,9 @@
                         <a:solidFill>
                           <a:schemeClr val="dk1"/>
                         </a:solidFill>
-                        <a:latin typeface="Open Sans"/>
+                        <a:latin typeface="Arial"/>
                         <a:ea typeface="Open Sans"/>
-                        <a:cs typeface="Open Sans"/>
+                        <a:cs typeface="Arial"/>
                         <a:sym typeface="Open Sans"/>
                       </a:endParaRPr>
                     </a:p>
@@ -45887,9 +45868,9 @@
                         <a:solidFill>
                           <a:schemeClr val="dk1"/>
                         </a:solidFill>
-                        <a:latin typeface="Open Sans"/>
+                        <a:latin typeface="Arial"/>
                         <a:ea typeface="Open Sans"/>
-                        <a:cs typeface="Open Sans"/>
+                        <a:cs typeface="Arial"/>
                         <a:sym typeface="Open Sans"/>
                       </a:endParaRPr>
                     </a:p>
@@ -45961,9 +45942,9 @@
                         <a:solidFill>
                           <a:schemeClr val="dk1"/>
                         </a:solidFill>
-                        <a:latin typeface="Hanken Grotesk"/>
+                        <a:latin typeface="Arial"/>
                         <a:ea typeface="Hanken Grotesk"/>
-                        <a:cs typeface="Hanken Grotesk"/>
+                        <a:cs typeface="Arial"/>
                         <a:sym typeface="Hanken Grotesk"/>
                       </a:endParaRPr>
                     </a:p>
@@ -46028,9 +46009,9 @@
                         <a:solidFill>
                           <a:schemeClr val="dk1"/>
                         </a:solidFill>
-                        <a:latin typeface="Hanken Grotesk"/>
+                        <a:latin typeface="Arial"/>
                         <a:ea typeface="Hanken Grotesk"/>
-                        <a:cs typeface="Hanken Grotesk"/>
+                        <a:cs typeface="Arial"/>
                         <a:sym typeface="Hanken Grotesk"/>
                       </a:endParaRPr>
                     </a:p>
@@ -46095,9 +46076,9 @@
                         <a:solidFill>
                           <a:schemeClr val="dk1"/>
                         </a:solidFill>
-                        <a:latin typeface="Open Sans"/>
+                        <a:latin typeface="Arial"/>
                         <a:ea typeface="Open Sans"/>
-                        <a:cs typeface="Open Sans"/>
+                        <a:cs typeface="Arial"/>
                         <a:sym typeface="Open Sans"/>
                       </a:endParaRPr>
                     </a:p>
@@ -46162,9 +46143,9 @@
                         <a:solidFill>
                           <a:schemeClr val="dk1"/>
                         </a:solidFill>
-                        <a:latin typeface="Open Sans"/>
+                        <a:latin typeface="Arial"/>
                         <a:ea typeface="Open Sans"/>
-                        <a:cs typeface="Open Sans"/>
+                        <a:cs typeface="Arial"/>
                         <a:sym typeface="Open Sans"/>
                       </a:endParaRPr>
                     </a:p>
@@ -46229,9 +46210,9 @@
                         <a:solidFill>
                           <a:schemeClr val="dk1"/>
                         </a:solidFill>
-                        <a:latin typeface="Open Sans"/>
+                        <a:latin typeface="Arial"/>
                         <a:ea typeface="Open Sans"/>
-                        <a:cs typeface="Open Sans"/>
+                        <a:cs typeface="Arial"/>
                         <a:sym typeface="Open Sans"/>
                       </a:endParaRPr>
                     </a:p>
@@ -46296,9 +46277,9 @@
                         <a:solidFill>
                           <a:schemeClr val="dk1"/>
                         </a:solidFill>
-                        <a:latin typeface="Open Sans"/>
+                        <a:latin typeface="Arial"/>
                         <a:ea typeface="Open Sans"/>
-                        <a:cs typeface="Open Sans"/>
+                        <a:cs typeface="Arial"/>
                         <a:sym typeface="Open Sans"/>
                       </a:endParaRPr>
                     </a:p>
@@ -46363,9 +46344,9 @@
                         <a:solidFill>
                           <a:schemeClr val="dk1"/>
                         </a:solidFill>
-                        <a:latin typeface="Open Sans"/>
+                        <a:latin typeface="Arial"/>
                         <a:ea typeface="Open Sans"/>
-                        <a:cs typeface="Open Sans"/>
+                        <a:cs typeface="Arial"/>
                         <a:sym typeface="Open Sans"/>
                       </a:endParaRPr>
                     </a:p>
@@ -46430,9 +46411,9 @@
                         <a:solidFill>
                           <a:schemeClr val="dk1"/>
                         </a:solidFill>
-                        <a:latin typeface="Open Sans"/>
+                        <a:latin typeface="Arial"/>
                         <a:ea typeface="Open Sans"/>
-                        <a:cs typeface="Open Sans"/>
+                        <a:cs typeface="Arial"/>
                         <a:sym typeface="Open Sans"/>
                       </a:endParaRPr>
                     </a:p>
@@ -46497,9 +46478,9 @@
                         <a:solidFill>
                           <a:schemeClr val="dk1"/>
                         </a:solidFill>
-                        <a:latin typeface="Open Sans"/>
+                        <a:latin typeface="Arial"/>
                         <a:ea typeface="Open Sans"/>
-                        <a:cs typeface="Open Sans"/>
+                        <a:cs typeface="Arial"/>
                         <a:sym typeface="Open Sans"/>
                       </a:endParaRPr>
                     </a:p>
@@ -46564,9 +46545,9 @@
                         <a:solidFill>
                           <a:schemeClr val="dk1"/>
                         </a:solidFill>
-                        <a:latin typeface="Open Sans"/>
+                        <a:latin typeface="Arial"/>
                         <a:ea typeface="Open Sans"/>
-                        <a:cs typeface="Open Sans"/>
+                        <a:cs typeface="Arial"/>
                         <a:sym typeface="Open Sans"/>
                       </a:endParaRPr>
                     </a:p>
@@ -46631,9 +46612,9 @@
                         <a:solidFill>
                           <a:schemeClr val="dk1"/>
                         </a:solidFill>
-                        <a:latin typeface="Open Sans"/>
+                        <a:latin typeface="Arial"/>
                         <a:ea typeface="Open Sans"/>
-                        <a:cs typeface="Open Sans"/>
+                        <a:cs typeface="Arial"/>
                         <a:sym typeface="Open Sans"/>
                       </a:endParaRPr>
                     </a:p>
@@ -46698,9 +46679,9 @@
                         <a:solidFill>
                           <a:schemeClr val="dk1"/>
                         </a:solidFill>
-                        <a:latin typeface="Open Sans"/>
+                        <a:latin typeface="Arial"/>
                         <a:ea typeface="Open Sans"/>
-                        <a:cs typeface="Open Sans"/>
+                        <a:cs typeface="Arial"/>
                         <a:sym typeface="Open Sans"/>
                       </a:endParaRPr>
                     </a:p>
@@ -46765,9 +46746,9 @@
                         <a:solidFill>
                           <a:schemeClr val="dk1"/>
                         </a:solidFill>
-                        <a:latin typeface="Open Sans"/>
+                        <a:latin typeface="Arial"/>
                         <a:ea typeface="Open Sans"/>
-                        <a:cs typeface="Open Sans"/>
+                        <a:cs typeface="Arial"/>
                         <a:sym typeface="Open Sans"/>
                       </a:endParaRPr>
                     </a:p>
@@ -46832,9 +46813,9 @@
                         <a:solidFill>
                           <a:schemeClr val="dk1"/>
                         </a:solidFill>
-                        <a:latin typeface="Open Sans"/>
+                        <a:latin typeface="Arial"/>
                         <a:ea typeface="Open Sans"/>
-                        <a:cs typeface="Open Sans"/>
+                        <a:cs typeface="Arial"/>
                         <a:sym typeface="Open Sans"/>
                       </a:endParaRPr>
                     </a:p>
@@ -46906,9 +46887,9 @@
                         <a:solidFill>
                           <a:schemeClr val="dk1"/>
                         </a:solidFill>
-                        <a:latin typeface="Hanken Grotesk"/>
+                        <a:latin typeface="Arial"/>
                         <a:ea typeface="Hanken Grotesk"/>
-                        <a:cs typeface="Hanken Grotesk"/>
+                        <a:cs typeface="Arial"/>
                         <a:sym typeface="Hanken Grotesk"/>
                       </a:endParaRPr>
                     </a:p>
@@ -46973,9 +46954,9 @@
                         <a:solidFill>
                           <a:schemeClr val="dk1"/>
                         </a:solidFill>
-                        <a:latin typeface="Hanken Grotesk"/>
+                        <a:latin typeface="Arial"/>
                         <a:ea typeface="Hanken Grotesk"/>
-                        <a:cs typeface="Hanken Grotesk"/>
+                        <a:cs typeface="Arial"/>
                         <a:sym typeface="Hanken Grotesk"/>
                       </a:endParaRPr>
                     </a:p>
@@ -47040,9 +47021,9 @@
                         <a:solidFill>
                           <a:schemeClr val="dk1"/>
                         </a:solidFill>
-                        <a:latin typeface="Open Sans"/>
+                        <a:latin typeface="Arial"/>
                         <a:ea typeface="Open Sans"/>
-                        <a:cs typeface="Open Sans"/>
+                        <a:cs typeface="Arial"/>
                         <a:sym typeface="Open Sans"/>
                       </a:endParaRPr>
                     </a:p>
@@ -47107,9 +47088,9 @@
                         <a:solidFill>
                           <a:schemeClr val="dk1"/>
                         </a:solidFill>
-                        <a:latin typeface="Open Sans"/>
+                        <a:latin typeface="Arial"/>
                         <a:ea typeface="Open Sans"/>
-                        <a:cs typeface="Open Sans"/>
+                        <a:cs typeface="Arial"/>
                         <a:sym typeface="Open Sans"/>
                       </a:endParaRPr>
                     </a:p>
@@ -47174,9 +47155,9 @@
                         <a:solidFill>
                           <a:schemeClr val="dk1"/>
                         </a:solidFill>
-                        <a:latin typeface="Open Sans"/>
+                        <a:latin typeface="Arial"/>
                         <a:ea typeface="Open Sans"/>
-                        <a:cs typeface="Open Sans"/>
+                        <a:cs typeface="Arial"/>
                         <a:sym typeface="Open Sans"/>
                       </a:endParaRPr>
                     </a:p>
@@ -47241,9 +47222,9 @@
                         <a:solidFill>
                           <a:schemeClr val="dk1"/>
                         </a:solidFill>
-                        <a:latin typeface="Open Sans"/>
+                        <a:latin typeface="Arial"/>
                         <a:ea typeface="Open Sans"/>
-                        <a:cs typeface="Open Sans"/>
+                        <a:cs typeface="Arial"/>
                         <a:sym typeface="Open Sans"/>
                       </a:endParaRPr>
                     </a:p>
@@ -47308,9 +47289,9 @@
                         <a:solidFill>
                           <a:schemeClr val="dk1"/>
                         </a:solidFill>
-                        <a:latin typeface="Open Sans"/>
+                        <a:latin typeface="Arial"/>
                         <a:ea typeface="Open Sans"/>
-                        <a:cs typeface="Open Sans"/>
+                        <a:cs typeface="Arial"/>
                         <a:sym typeface="Open Sans"/>
                       </a:endParaRPr>
                     </a:p>
@@ -47375,9 +47356,9 @@
                         <a:solidFill>
                           <a:schemeClr val="dk1"/>
                         </a:solidFill>
-                        <a:latin typeface="Open Sans"/>
+                        <a:latin typeface="Arial"/>
                         <a:ea typeface="Open Sans"/>
-                        <a:cs typeface="Open Sans"/>
+                        <a:cs typeface="Arial"/>
                         <a:sym typeface="Open Sans"/>
                       </a:endParaRPr>
                     </a:p>
@@ -47442,9 +47423,9 @@
                         <a:solidFill>
                           <a:schemeClr val="dk1"/>
                         </a:solidFill>
-                        <a:latin typeface="Open Sans"/>
+                        <a:latin typeface="Arial"/>
                         <a:ea typeface="Open Sans"/>
-                        <a:cs typeface="Open Sans"/>
+                        <a:cs typeface="Arial"/>
                         <a:sym typeface="Open Sans"/>
                       </a:endParaRPr>
                     </a:p>
@@ -47509,9 +47490,9 @@
                         <a:solidFill>
                           <a:schemeClr val="dk1"/>
                         </a:solidFill>
-                        <a:latin typeface="Open Sans"/>
+                        <a:latin typeface="Arial"/>
                         <a:ea typeface="Open Sans"/>
-                        <a:cs typeface="Open Sans"/>
+                        <a:cs typeface="Arial"/>
                         <a:sym typeface="Open Sans"/>
                       </a:endParaRPr>
                     </a:p>
@@ -47576,9 +47557,9 @@
                         <a:solidFill>
                           <a:schemeClr val="dk1"/>
                         </a:solidFill>
-                        <a:latin typeface="Open Sans"/>
+                        <a:latin typeface="Arial"/>
                         <a:ea typeface="Open Sans"/>
-                        <a:cs typeface="Open Sans"/>
+                        <a:cs typeface="Arial"/>
                         <a:sym typeface="Open Sans"/>
                       </a:endParaRPr>
                     </a:p>
@@ -47643,9 +47624,9 @@
                         <a:solidFill>
                           <a:schemeClr val="dk1"/>
                         </a:solidFill>
-                        <a:latin typeface="Open Sans"/>
+                        <a:latin typeface="Arial"/>
                         <a:ea typeface="Open Sans"/>
-                        <a:cs typeface="Open Sans"/>
+                        <a:cs typeface="Arial"/>
                         <a:sym typeface="Open Sans"/>
                       </a:endParaRPr>
                     </a:p>
@@ -47710,9 +47691,9 @@
                         <a:solidFill>
                           <a:schemeClr val="dk1"/>
                         </a:solidFill>
-                        <a:latin typeface="Open Sans"/>
+                        <a:latin typeface="Arial"/>
                         <a:ea typeface="Open Sans"/>
-                        <a:cs typeface="Open Sans"/>
+                        <a:cs typeface="Arial"/>
                         <a:sym typeface="Open Sans"/>
                       </a:endParaRPr>
                     </a:p>
@@ -47777,9 +47758,9 @@
                         <a:solidFill>
                           <a:schemeClr val="dk1"/>
                         </a:solidFill>
-                        <a:latin typeface="Open Sans"/>
+                        <a:latin typeface="Arial"/>
                         <a:ea typeface="Open Sans"/>
-                        <a:cs typeface="Open Sans"/>
+                        <a:cs typeface="Arial"/>
                         <a:sym typeface="Open Sans"/>
                       </a:endParaRPr>
                     </a:p>
@@ -47851,9 +47832,9 @@
                         <a:solidFill>
                           <a:schemeClr val="dk1"/>
                         </a:solidFill>
-                        <a:latin typeface="Hanken Grotesk"/>
+                        <a:latin typeface="Arial"/>
                         <a:ea typeface="Hanken Grotesk"/>
-                        <a:cs typeface="Hanken Grotesk"/>
+                        <a:cs typeface="Arial"/>
                         <a:sym typeface="Hanken Grotesk"/>
                       </a:endParaRPr>
                     </a:p>
@@ -47918,9 +47899,9 @@
                         <a:solidFill>
                           <a:schemeClr val="dk1"/>
                         </a:solidFill>
-                        <a:latin typeface="Hanken Grotesk"/>
+                        <a:latin typeface="Arial"/>
                         <a:ea typeface="Hanken Grotesk"/>
-                        <a:cs typeface="Hanken Grotesk"/>
+                        <a:cs typeface="Arial"/>
                         <a:sym typeface="Hanken Grotesk"/>
                       </a:endParaRPr>
                     </a:p>
@@ -47985,9 +47966,9 @@
                         <a:solidFill>
                           <a:schemeClr val="dk1"/>
                         </a:solidFill>
-                        <a:latin typeface="Open Sans"/>
+                        <a:latin typeface="Arial"/>
                         <a:ea typeface="Open Sans"/>
-                        <a:cs typeface="Open Sans"/>
+                        <a:cs typeface="Arial"/>
                         <a:sym typeface="Open Sans"/>
                       </a:endParaRPr>
                     </a:p>
@@ -48052,9 +48033,9 @@
                         <a:solidFill>
                           <a:schemeClr val="dk1"/>
                         </a:solidFill>
-                        <a:latin typeface="Open Sans"/>
+                        <a:latin typeface="Arial"/>
                         <a:ea typeface="Open Sans"/>
-                        <a:cs typeface="Open Sans"/>
+                        <a:cs typeface="Arial"/>
                         <a:sym typeface="Open Sans"/>
                       </a:endParaRPr>
                     </a:p>
@@ -48119,9 +48100,9 @@
                         <a:solidFill>
                           <a:schemeClr val="dk1"/>
                         </a:solidFill>
-                        <a:latin typeface="Open Sans"/>
+                        <a:latin typeface="Arial"/>
                         <a:ea typeface="Open Sans"/>
-                        <a:cs typeface="Open Sans"/>
+                        <a:cs typeface="Arial"/>
                         <a:sym typeface="Open Sans"/>
                       </a:endParaRPr>
                     </a:p>
@@ -48186,9 +48167,9 @@
                         <a:solidFill>
                           <a:schemeClr val="dk1"/>
                         </a:solidFill>
-                        <a:latin typeface="Open Sans"/>
+                        <a:latin typeface="Arial"/>
                         <a:ea typeface="Open Sans"/>
-                        <a:cs typeface="Open Sans"/>
+                        <a:cs typeface="Arial"/>
                         <a:sym typeface="Open Sans"/>
                       </a:endParaRPr>
                     </a:p>
@@ -48253,9 +48234,9 @@
                         <a:solidFill>
                           <a:schemeClr val="dk1"/>
                         </a:solidFill>
-                        <a:latin typeface="Open Sans"/>
+                        <a:latin typeface="Arial"/>
                         <a:ea typeface="Open Sans"/>
-                        <a:cs typeface="Open Sans"/>
+                        <a:cs typeface="Arial"/>
                         <a:sym typeface="Open Sans"/>
                       </a:endParaRPr>
                     </a:p>
@@ -48320,9 +48301,9 @@
                         <a:solidFill>
                           <a:schemeClr val="dk1"/>
                         </a:solidFill>
-                        <a:latin typeface="Open Sans"/>
+                        <a:latin typeface="Arial"/>
                         <a:ea typeface="Open Sans"/>
-                        <a:cs typeface="Open Sans"/>
+                        <a:cs typeface="Arial"/>
                         <a:sym typeface="Open Sans"/>
                       </a:endParaRPr>
                     </a:p>
@@ -48387,9 +48368,9 @@
                         <a:solidFill>
                           <a:schemeClr val="dk1"/>
                         </a:solidFill>
-                        <a:latin typeface="Open Sans"/>
+                        <a:latin typeface="Arial"/>
                         <a:ea typeface="Open Sans"/>
-                        <a:cs typeface="Open Sans"/>
+                        <a:cs typeface="Arial"/>
                         <a:sym typeface="Open Sans"/>
                       </a:endParaRPr>
                     </a:p>
@@ -48454,9 +48435,9 @@
                         <a:solidFill>
                           <a:schemeClr val="dk1"/>
                         </a:solidFill>
-                        <a:latin typeface="Open Sans"/>
+                        <a:latin typeface="Arial"/>
                         <a:ea typeface="Open Sans"/>
-                        <a:cs typeface="Open Sans"/>
+                        <a:cs typeface="Arial"/>
                         <a:sym typeface="Open Sans"/>
                       </a:endParaRPr>
                     </a:p>
@@ -48521,9 +48502,9 @@
                         <a:solidFill>
                           <a:schemeClr val="dk1"/>
                         </a:solidFill>
-                        <a:latin typeface="Open Sans"/>
+                        <a:latin typeface="Arial"/>
                         <a:ea typeface="Open Sans"/>
-                        <a:cs typeface="Open Sans"/>
+                        <a:cs typeface="Arial"/>
                         <a:sym typeface="Open Sans"/>
                       </a:endParaRPr>
                     </a:p>
@@ -48588,9 +48569,9 @@
                         <a:solidFill>
                           <a:schemeClr val="dk1"/>
                         </a:solidFill>
-                        <a:latin typeface="Open Sans"/>
+                        <a:latin typeface="Arial"/>
                         <a:ea typeface="Open Sans"/>
-                        <a:cs typeface="Open Sans"/>
+                        <a:cs typeface="Arial"/>
                         <a:sym typeface="Open Sans"/>
                       </a:endParaRPr>
                     </a:p>
@@ -48655,9 +48636,9 @@
                         <a:solidFill>
                           <a:schemeClr val="dk1"/>
                         </a:solidFill>
-                        <a:latin typeface="Open Sans"/>
+                        <a:latin typeface="Arial"/>
                         <a:ea typeface="Open Sans"/>
-                        <a:cs typeface="Open Sans"/>
+                        <a:cs typeface="Arial"/>
                         <a:sym typeface="Open Sans"/>
                       </a:endParaRPr>
                     </a:p>
@@ -48722,9 +48703,9 @@
                         <a:solidFill>
                           <a:schemeClr val="dk1"/>
                         </a:solidFill>
-                        <a:latin typeface="Open Sans"/>
+                        <a:latin typeface="Arial"/>
                         <a:ea typeface="Open Sans"/>
-                        <a:cs typeface="Open Sans"/>
+                        <a:cs typeface="Arial"/>
                         <a:sym typeface="Open Sans"/>
                       </a:endParaRPr>
                     </a:p>

--- a/slides/slide_15.pptx
+++ b/slides/slide_15.pptx
@@ -861,7 +861,7 @@
           <a:bodyPr/>
           <a:lstStyle/>
           <a:p>
-            <a:fld id="{4F53A338-ADD6-4F91-9E21-E0B764880028}" type="datetimeFigureOut">
+            <a:fld id="{CF4CBC43-A142-440D-BB41-A4DC023B04C5}" type="datetimeFigureOut">
               <a:rPr lang="en-US" smtClean="0"/>
               <a:t>11/7/2009</a:t>
             </a:fld>
@@ -1025,7 +1025,7 @@
           <a:bodyPr/>
           <a:lstStyle/>
           <a:p>
-            <a:fld id="{46EACBF0-B278-415A-AA3B-F9F5F0F5FDE3}" type="datetimeFigureOut">
+            <a:fld id="{1515F605-E714-4C02-AAB5-52786E2B6586}" type="datetimeFigureOut">
               <a:rPr lang="en-US" smtClean="0"/>
               <a:t>11/7/2009</a:t>
             </a:fld>
@@ -1189,7 +1189,7 @@
           <a:bodyPr/>
           <a:lstStyle/>
           <a:p>
-            <a:fld id="{3ECFD59D-21FA-47E2-B4D3-F748B7161BDD}" type="datetimeFigureOut">
+            <a:fld id="{953B91A4-A35B-4149-8497-60D8715608B1}" type="datetimeFigureOut">
               <a:rPr lang="en-US" smtClean="0"/>
               <a:t>11/7/2009</a:t>
             </a:fld>
@@ -13094,7 +13094,7 @@
           <a:bodyPr/>
           <a:lstStyle/>
           <a:p>
-            <a:fld id="{17BD3605-7195-426B-8B3E-A8238DF9DD33}" type="datetimeFigureOut">
+            <a:fld id="{B5C03D26-06FA-49AC-A461-08DB3A65FDC3}" type="datetimeFigureOut">
               <a:rPr lang="en-US" smtClean="0"/>
               <a:t>11/7/2009</a:t>
             </a:fld>
@@ -33195,7 +33195,7 @@
           <a:bodyPr/>
           <a:lstStyle/>
           <a:p>
-            <a:fld id="{AE5020B4-C156-4987-9011-E3A88D06E747}" type="datetimeFigureOut">
+            <a:fld id="{EB220D49-5A69-4DF7-8CA4-B719AB1A07A9}" type="datetimeFigureOut">
               <a:rPr lang="en-US" smtClean="0"/>
               <a:t>11/7/2009</a:t>
             </a:fld>
@@ -38842,7 +38842,7 @@
           <a:bodyPr/>
           <a:lstStyle/>
           <a:p>
-            <a:fld id="{5864C434-0F35-46FE-9897-03C2CA4BB02C}" type="datetimeFigureOut">
+            <a:fld id="{9A2B9D55-952B-4D76-B520-0DF1250C7D1F}" type="datetimeFigureOut">
               <a:rPr lang="en-US" smtClean="0"/>
               <a:t>11/7/2009</a:t>
             </a:fld>
@@ -39231,7 +39231,7 @@
           <a:bodyPr/>
           <a:lstStyle/>
           <a:p>
-            <a:fld id="{8B090697-7021-480A-932B-34FE33A6B528}" type="datetimeFigureOut">
+            <a:fld id="{2C964A0A-2111-4DB2-85AD-C674A498D53A}" type="datetimeFigureOut">
               <a:rPr lang="en-US" smtClean="0"/>
               <a:t>11/7/2009</a:t>
             </a:fld>
@@ -39344,7 +39344,7 @@
           <a:bodyPr/>
           <a:lstStyle/>
           <a:p>
-            <a:fld id="{47F269F2-7F7F-49D4-AC14-7A2F1B61CF5A}" type="datetimeFigureOut">
+            <a:fld id="{C6B0931D-206A-4AE4-A322-14EF5CFC4D34}" type="datetimeFigureOut">
               <a:rPr lang="en-US" smtClean="0"/>
               <a:t>11/7/2009</a:t>
             </a:fld>
@@ -39434,7 +39434,7 @@
           <a:bodyPr/>
           <a:lstStyle/>
           <a:p>
-            <a:fld id="{8A51F419-ABE5-43F6-AE58-96F5CC5FE926}" type="datetimeFigureOut">
+            <a:fld id="{4A894ABA-30DF-46B1-9964-16DB07083788}" type="datetimeFigureOut">
               <a:rPr lang="en-US" smtClean="0"/>
               <a:t>11/7/2009</a:t>
             </a:fld>
@@ -39689,7 +39689,7 @@
           <a:bodyPr/>
           <a:lstStyle/>
           <a:p>
-            <a:fld id="{BF9A2B61-7E0C-41A5-A771-3234BBBD97C9}" type="datetimeFigureOut">
+            <a:fld id="{CB49937D-9E52-4DEB-9F1C-6FC66C5B4EAD}" type="datetimeFigureOut">
               <a:rPr lang="en-US" smtClean="0"/>
               <a:t>11/7/2009</a:t>
             </a:fld>
@@ -39921,7 +39921,7 @@
           <a:bodyPr/>
           <a:lstStyle/>
           <a:p>
-            <a:fld id="{AD37A101-8134-4183-BF84-AE4BCDD56678}" type="datetimeFigureOut">
+            <a:fld id="{8E7B76F0-467E-4F82-B77A-1AB02719E96C}" type="datetimeFigureOut">
               <a:rPr lang="en-US" smtClean="0"/>
               <a:t>11/7/2009</a:t>
             </a:fld>
